--- a/Aarogya_AI_Final.pptx
+++ b/Aarogya_AI_Final.pptx
@@ -14,7 +14,8 @@
     <p:sldId id="265" r:id="rId9"/>
     <p:sldId id="266" r:id="rId10"/>
     <p:sldId id="263" r:id="rId11"/>
-    <p:sldId id="262" r:id="rId12"/>
+    <p:sldId id="267" r:id="rId12"/>
+    <p:sldId id="262" r:id="rId13"/>
   </p:sldIdLst>
   <p:sldSz cx="12192000" cy="6858000"/>
   <p:notesSz cx="12192000" cy="6858000"/>
@@ -223,6 +224,18 @@
   <p:clrMapOvr>
     <a:masterClrMapping/>
   </p:clrMapOvr>
+  <mc:AlternateContent xmlns:mc="http://schemas.openxmlformats.org/markup-compatibility/2006">
+    <mc:Choice xmlns:p14="http://schemas.microsoft.com/office/powerpoint/2010/main" Requires="p14">
+      <p:transition spd="med" p14:dur="699">
+        <p:fade/>
+      </p:transition>
+    </mc:Choice>
+    <mc:Fallback>
+      <p:transition spd="med">
+        <p:fade/>
+      </p:transition>
+    </mc:Fallback>
+  </mc:AlternateContent>
 </p:sldLayout>
 </file>
 
@@ -387,6 +400,18 @@
   <p:clrMapOvr>
     <a:masterClrMapping/>
   </p:clrMapOvr>
+  <mc:AlternateContent xmlns:mc="http://schemas.openxmlformats.org/markup-compatibility/2006">
+    <mc:Choice xmlns:p14="http://schemas.microsoft.com/office/powerpoint/2010/main" Requires="p14">
+      <p:transition spd="med" p14:dur="699">
+        <p:fade/>
+      </p:transition>
+    </mc:Choice>
+    <mc:Fallback>
+      <p:transition spd="med">
+        <p:fade/>
+      </p:transition>
+    </mc:Fallback>
+  </mc:AlternateContent>
 </p:sldLayout>
 </file>
 
@@ -592,6 +617,18 @@
   <p:clrMapOvr>
     <a:masterClrMapping/>
   </p:clrMapOvr>
+  <mc:AlternateContent xmlns:mc="http://schemas.openxmlformats.org/markup-compatibility/2006">
+    <mc:Choice xmlns:p14="http://schemas.microsoft.com/office/powerpoint/2010/main" Requires="p14">
+      <p:transition spd="med" p14:dur="699">
+        <p:fade/>
+      </p:transition>
+    </mc:Choice>
+    <mc:Fallback>
+      <p:transition spd="med">
+        <p:fade/>
+      </p:transition>
+    </mc:Fallback>
+  </mc:AlternateContent>
 </p:sldLayout>
 </file>
 
@@ -735,6 +772,18 @@
   <p:clrMapOvr>
     <a:masterClrMapping/>
   </p:clrMapOvr>
+  <mc:AlternateContent xmlns:mc="http://schemas.openxmlformats.org/markup-compatibility/2006">
+    <mc:Choice xmlns:p14="http://schemas.microsoft.com/office/powerpoint/2010/main" Requires="p14">
+      <p:transition spd="med" p14:dur="699">
+        <p:fade/>
+      </p:transition>
+    </mc:Choice>
+    <mc:Fallback>
+      <p:transition spd="med">
+        <p:fade/>
+      </p:transition>
+    </mc:Fallback>
+  </mc:AlternateContent>
 </p:sldLayout>
 </file>
 
@@ -907,6 +956,18 @@
   <p:clrMapOvr>
     <a:masterClrMapping/>
   </p:clrMapOvr>
+  <mc:AlternateContent xmlns:mc="http://schemas.openxmlformats.org/markup-compatibility/2006">
+    <mc:Choice xmlns:p14="http://schemas.microsoft.com/office/powerpoint/2010/main" Requires="p14">
+      <p:transition spd="med" p14:dur="699">
+        <p:fade/>
+      </p:transition>
+    </mc:Choice>
+    <mc:Fallback>
+      <p:transition spd="med">
+        <p:fade/>
+      </p:transition>
+    </mc:Fallback>
+  </mc:AlternateContent>
 </p:sldLayout>
 </file>
 
@@ -932,6 +993,18 @@
   <p:clrMapOvr>
     <a:masterClrMapping/>
   </p:clrMapOvr>
+  <mc:AlternateContent xmlns:mc="http://schemas.openxmlformats.org/markup-compatibility/2006">
+    <mc:Choice xmlns:p14="http://schemas.microsoft.com/office/powerpoint/2010/main" Requires="p14">
+      <p:transition spd="med" p14:dur="699">
+        <p:fade/>
+      </p:transition>
+    </mc:Choice>
+    <mc:Fallback>
+      <p:transition spd="med">
+        <p:fade/>
+      </p:transition>
+    </mc:Fallback>
+  </mc:AlternateContent>
 </p:sldLayout>
 </file>
 
@@ -1160,6 +1233,18 @@
     <p:sldLayoutId id="2147483653" r:id="rId5"/>
     <p:sldLayoutId id="2147483654" r:id="rId6"/>
   </p:sldLayoutIdLst>
+  <mc:AlternateContent xmlns:mc="http://schemas.openxmlformats.org/markup-compatibility/2006">
+    <mc:Choice xmlns:p14="http://schemas.microsoft.com/office/powerpoint/2010/main" Requires="p14">
+      <p:transition spd="med" p14:dur="699">
+        <p:fade/>
+      </p:transition>
+    </mc:Choice>
+    <mc:Fallback>
+      <p:transition spd="med">
+        <p:fade/>
+      </p:transition>
+    </mc:Fallback>
+  </mc:AlternateContent>
   <p:txStyles>
     <p:titleStyle>
       <a:lvl1pPr>
@@ -2772,10 +2857,76 @@
   <p:clrMapOvr>
     <a:masterClrMapping/>
   </p:clrMapOvr>
+  <mc:AlternateContent xmlns:mc="http://schemas.openxmlformats.org/markup-compatibility/2006">
+    <mc:Choice xmlns:p14="http://schemas.microsoft.com/office/powerpoint/2010/main" Requires="p14">
+      <p:transition spd="med" p14:dur="699">
+        <p:fade/>
+      </p:transition>
+    </mc:Choice>
+    <mc:Fallback>
+      <p:transition spd="med">
+        <p:fade/>
+      </p:transition>
+    </mc:Fallback>
+  </mc:AlternateContent>
 </p:sld>
 </file>
 
 <file path=ppt/slides/slide10.xml><?xml version="1.0" encoding="utf-8"?>
+<p:sld xmlns:a="http://schemas.openxmlformats.org/drawingml/2006/main" xmlns:r="http://schemas.openxmlformats.org/officeDocument/2006/relationships" xmlns:p="http://schemas.openxmlformats.org/presentationml/2006/main">
+  <p:cSld>
+    <p:spTree>
+      <p:nvGrpSpPr>
+        <p:cNvPr id="1" name=""/>
+        <p:cNvGrpSpPr/>
+        <p:nvPr/>
+      </p:nvGrpSpPr>
+      <p:grpSpPr/>
+      <p:pic>
+        <p:nvPicPr>
+          <p:cNvPr id="2" name="Picture 1" descr="slide_roadmap.png"/>
+          <p:cNvPicPr>
+            <a:picLocks noChangeAspect="1"/>
+          </p:cNvPicPr>
+          <p:nvPr/>
+        </p:nvPicPr>
+        <p:blipFill>
+          <a:blip r:embed="rId1"/>
+          <a:stretch>
+            <a:fillRect/>
+          </a:stretch>
+        </p:blipFill>
+        <p:spPr>
+          <a:xfrm>
+            <a:off x="0" y="0"/>
+            <a:ext cx="12192000" cy="6858000"/>
+          </a:xfrm>
+          <a:prstGeom prst="rect">
+            <a:avLst/>
+          </a:prstGeom>
+        </p:spPr>
+      </p:pic>
+    </p:spTree>
+  </p:cSld>
+  <p:clrMapOvr>
+    <a:masterClrMapping/>
+  </p:clrMapOvr>
+  <mc:AlternateContent xmlns:mc="http://schemas.openxmlformats.org/markup-compatibility/2006">
+    <mc:Choice xmlns:p14="http://schemas.microsoft.com/office/powerpoint/2010/main" Requires="p14">
+      <p:transition spd="med" p14:dur="699">
+        <p:fade/>
+      </p:transition>
+    </mc:Choice>
+    <mc:Fallback>
+      <p:transition spd="med">
+        <p:fade/>
+      </p:transition>
+    </mc:Fallback>
+  </mc:AlternateContent>
+</p:sld>
+</file>
+
+<file path=ppt/slides/slide11.xml><?xml version="1.0" encoding="utf-8"?>
 <p:sld xmlns:a="http://schemas.openxmlformats.org/drawingml/2006/main" xmlns:r="http://schemas.openxmlformats.org/officeDocument/2006/relationships" xmlns:p="http://schemas.openxmlformats.org/presentationml/2006/main" showMasterSp="0">
   <p:cSld>
     <p:spTree>
@@ -5461,6 +5612,18 @@
   <p:clrMapOvr>
     <a:masterClrMapping/>
   </p:clrMapOvr>
+  <mc:AlternateContent xmlns:mc="http://schemas.openxmlformats.org/markup-compatibility/2006">
+    <mc:Choice xmlns:p14="http://schemas.microsoft.com/office/powerpoint/2010/main" Requires="p14">
+      <p:transition spd="med" p14:dur="699">
+        <p:fade/>
+      </p:transition>
+    </mc:Choice>
+    <mc:Fallback>
+      <p:transition spd="med">
+        <p:fade/>
+      </p:transition>
+    </mc:Fallback>
+  </mc:AlternateContent>
 </p:sld>
 </file>
 
@@ -9553,6 +9716,18 @@
   <p:clrMapOvr>
     <a:masterClrMapping/>
   </p:clrMapOvr>
+  <mc:AlternateContent xmlns:mc="http://schemas.openxmlformats.org/markup-compatibility/2006">
+    <mc:Choice xmlns:p14="http://schemas.microsoft.com/office/powerpoint/2010/main" Requires="p14">
+      <p:transition spd="med" p14:dur="699">
+        <p:fade/>
+      </p:transition>
+    </mc:Choice>
+    <mc:Fallback>
+      <p:transition spd="med">
+        <p:fade/>
+      </p:transition>
+    </mc:Fallback>
+  </mc:AlternateContent>
 </p:sld>
 </file>
 
@@ -11235,6 +11410,18 @@
   <p:clrMapOvr>
     <a:masterClrMapping/>
   </p:clrMapOvr>
+  <mc:AlternateContent xmlns:mc="http://schemas.openxmlformats.org/markup-compatibility/2006">
+    <mc:Choice xmlns:p14="http://schemas.microsoft.com/office/powerpoint/2010/main" Requires="p14">
+      <p:transition spd="med" p14:dur="699">
+        <p:fade/>
+      </p:transition>
+    </mc:Choice>
+    <mc:Fallback>
+      <p:transition spd="med">
+        <p:fade/>
+      </p:transition>
+    </mc:Fallback>
+  </mc:AlternateContent>
 </p:sld>
 </file>
 
@@ -15790,6 +15977,18 @@
   <p:clrMapOvr>
     <a:masterClrMapping/>
   </p:clrMapOvr>
+  <mc:AlternateContent xmlns:mc="http://schemas.openxmlformats.org/markup-compatibility/2006">
+    <mc:Choice xmlns:p14="http://schemas.microsoft.com/office/powerpoint/2010/main" Requires="p14">
+      <p:transition spd="med" p14:dur="699">
+        <p:fade/>
+      </p:transition>
+    </mc:Choice>
+    <mc:Fallback>
+      <p:transition spd="med">
+        <p:fade/>
+      </p:transition>
+    </mc:Fallback>
+  </mc:AlternateContent>
 </p:sld>
 </file>
 
@@ -18410,6 +18609,18 @@
   <p:clrMapOvr>
     <a:masterClrMapping/>
   </p:clrMapOvr>
+  <mc:AlternateContent xmlns:mc="http://schemas.openxmlformats.org/markup-compatibility/2006">
+    <mc:Choice xmlns:p14="http://schemas.microsoft.com/office/powerpoint/2010/main" Requires="p14">
+      <p:transition spd="med" p14:dur="699">
+        <p:fade/>
+      </p:transition>
+    </mc:Choice>
+    <mc:Fallback>
+      <p:transition spd="med">
+        <p:fade/>
+      </p:transition>
+    </mc:Fallback>
+  </mc:AlternateContent>
 </p:sld>
 </file>
 
@@ -18452,6 +18663,18 @@
   <p:clrMapOvr>
     <a:masterClrMapping/>
   </p:clrMapOvr>
+  <mc:AlternateContent xmlns:mc="http://schemas.openxmlformats.org/markup-compatibility/2006">
+    <mc:Choice xmlns:p14="http://schemas.microsoft.com/office/powerpoint/2010/main" Requires="p14">
+      <p:transition spd="med" p14:dur="699">
+        <p:fade/>
+      </p:transition>
+    </mc:Choice>
+    <mc:Fallback>
+      <p:transition spd="med">
+        <p:fade/>
+      </p:transition>
+    </mc:Fallback>
+  </mc:AlternateContent>
 </p:sld>
 </file>
 
@@ -18494,6 +18717,18 @@
   <p:clrMapOvr>
     <a:masterClrMapping/>
   </p:clrMapOvr>
+  <mc:AlternateContent xmlns:mc="http://schemas.openxmlformats.org/markup-compatibility/2006">
+    <mc:Choice xmlns:p14="http://schemas.microsoft.com/office/powerpoint/2010/main" Requires="p14">
+      <p:transition spd="med" p14:dur="699">
+        <p:fade/>
+      </p:transition>
+    </mc:Choice>
+    <mc:Fallback>
+      <p:transition spd="med">
+        <p:fade/>
+      </p:transition>
+    </mc:Fallback>
+  </mc:AlternateContent>
 </p:sld>
 </file>
 
@@ -18536,6 +18771,18 @@
   <p:clrMapOvr>
     <a:masterClrMapping/>
   </p:clrMapOvr>
+  <mc:AlternateContent xmlns:mc="http://schemas.openxmlformats.org/markup-compatibility/2006">
+    <mc:Choice xmlns:p14="http://schemas.microsoft.com/office/powerpoint/2010/main" Requires="p14">
+      <p:transition spd="med" p14:dur="699">
+        <p:fade/>
+      </p:transition>
+    </mc:Choice>
+    <mc:Fallback>
+      <p:transition spd="med">
+        <p:fade/>
+      </p:transition>
+    </mc:Fallback>
+  </mc:AlternateContent>
 </p:sld>
 </file>
 
@@ -18586,6 +18833,18 @@
   <p:clrMapOvr>
     <a:masterClrMapping/>
   </p:clrMapOvr>
+  <mc:AlternateContent xmlns:mc="http://schemas.openxmlformats.org/markup-compatibility/2006">
+    <mc:Choice xmlns:p14="http://schemas.microsoft.com/office/powerpoint/2010/main" Requires="p14">
+      <p:transition spd="med" p14:dur="699">
+        <p:fade/>
+      </p:transition>
+    </mc:Choice>
+    <mc:Fallback>
+      <p:transition spd="med">
+        <p:fade/>
+      </p:transition>
+    </mc:Fallback>
+  </mc:AlternateContent>
 </p:sld>
 </file>
 

--- a/Aarogya_AI_Final.pptx
+++ b/Aarogya_AI_Final.pptx
@@ -27,7 +27,7 @@
   <p:extLst>
     <p:ext uri="{EFAFB233-063F-42B5-8137-9DF3F51BA10A}">
       <p15:sldGuideLst xmlns:p15="http://schemas.microsoft.com/office/powerpoint/2012/main">
-        <p15:guide id="1" orient="horz" pos="2880" userDrawn="1">
+        <p15:guide id="1" orient="horz" pos="2857" userDrawn="1">
           <p15:clr>
             <a:srgbClr val="A4A3A4"/>
           </p15:clr>
@@ -13474,8 +13474,8 @@
         </p:nvSpPr>
         <p:spPr>
           <a:xfrm>
-            <a:off x="6381402" y="2874515"/>
-            <a:ext cx="1496695" cy="425450"/>
+            <a:off x="6324600" y="2895600"/>
+            <a:ext cx="1643380" cy="414655"/>
           </a:xfrm>
           <a:prstGeom prst="rect">
             <a:avLst/>
@@ -13487,117 +13487,134 @@
           </a:bodyPr>
           <a:lstStyle/>
           <a:p>
-            <a:pPr marL="12700" marR="5080" indent="149860">
+            <a:pPr marL="328930" marR="5080" lvl="0" indent="-316865" algn="l" rtl="0" eaLnBrk="1" fontAlgn="auto" latinLnBrk="0" hangingPunct="1">
               <a:lnSpc>
                 <a:spcPct val="114000"/>
               </a:lnSpc>
               <a:spcBef>
                 <a:spcPts val="95"/>
               </a:spcBef>
+              <a:buClrTx/>
+              <a:buSzTx/>
+              <a:buFontTx/>
+              <a:buNone/>
             </a:pPr>
             <a:r>
-              <a:rPr sz="1150" spc="-35" dirty="0">
+              <a:rPr kumimoji="0" sz="1150" b="0" i="0" u="none" strike="noStrike" kern="0" cap="none" spc="-25" normalizeH="0" baseline="0" noProof="1" dirty="0">
                 <a:solidFill>
                   <a:srgbClr val="6A20A7"/>
                 </a:solidFill>
                 <a:latin typeface="Microsoft Sans Serif" panose="020B0604020202020204"/>
-                <a:cs typeface="Microsoft Sans Serif" panose="020B0604020202020204"/>
+                <a:ea typeface="Arial" panose="020B0604020202020204" pitchFamily="34" charset="0"/>
+                <a:cs typeface="Microsoft Sans Serif" panose="020B0604020202020204"/>
+                <a:sym typeface="+mn-ea"/>
               </a:rPr>
               <a:t>Disease</a:t>
             </a:r>
             <a:r>
-              <a:rPr sz="1150" spc="-20" dirty="0">
+              <a:rPr kumimoji="0" sz="1150" b="0" i="0" u="none" strike="noStrike" kern="0" cap="none" spc="-25" normalizeH="0" baseline="0" noProof="1" dirty="0">
                 <a:solidFill>
                   <a:srgbClr val="6A20A7"/>
                 </a:solidFill>
                 <a:latin typeface="Microsoft Sans Serif" panose="020B0604020202020204"/>
-                <a:cs typeface="Microsoft Sans Serif" panose="020B0604020202020204"/>
-              </a:rPr>
-              <a:t> </a:t>
-            </a:r>
-            <a:r>
-              <a:rPr sz="1150" spc="-10" dirty="0">
+                <a:ea typeface="Arial" panose="020B0604020202020204" pitchFamily="34" charset="0"/>
+                <a:cs typeface="Microsoft Sans Serif" panose="020B0604020202020204"/>
+                <a:sym typeface="+mn-ea"/>
+              </a:rPr>
+              <a:t> </a:t>
+            </a:r>
+            <a:r>
+              <a:rPr kumimoji="0" sz="1150" b="0" i="0" u="none" strike="noStrike" kern="0" cap="none" spc="-25" normalizeH="0" baseline="0" noProof="1" dirty="0">
                 <a:solidFill>
                   <a:srgbClr val="6A20A7"/>
                 </a:solidFill>
                 <a:latin typeface="Microsoft Sans Serif" panose="020B0604020202020204"/>
-                <a:cs typeface="Microsoft Sans Serif" panose="020B0604020202020204"/>
-              </a:rPr>
-              <a:t>prediction </a:t>
-            </a:r>
-            <a:r>
-              <a:rPr sz="1150" spc="-20" dirty="0">
+                <a:ea typeface="Arial" panose="020B0604020202020204" pitchFamily="34" charset="0"/>
+                <a:cs typeface="Microsoft Sans Serif" panose="020B0604020202020204"/>
+                <a:sym typeface="+mn-ea"/>
+              </a:rPr>
+              <a:t>prediction</a:t>
+            </a:r>
+            <a:r>
+              <a:rPr kumimoji="0" lang="en-IN" altLang="" sz="1150" b="0" i="0" u="none" strike="noStrike" kern="0" cap="none" spc="-25" normalizeH="0" baseline="0" noProof="1" dirty="0">
                 <a:solidFill>
                   <a:srgbClr val="6A20A7"/>
                 </a:solidFill>
                 <a:latin typeface="Microsoft Sans Serif" panose="020B0604020202020204"/>
-                <a:cs typeface="Microsoft Sans Serif" panose="020B0604020202020204"/>
+                <a:ea typeface="Arial" panose="020B0604020202020204" pitchFamily="34" charset="0"/>
+                <a:cs typeface="Microsoft Sans Serif" panose="020B0604020202020204"/>
+                <a:sym typeface="+mn-ea"/>
+              </a:rPr>
+              <a:t> </a:t>
+            </a:r>
+            <a:r>
+              <a:rPr kumimoji="0" sz="1150" b="0" i="0" u="none" strike="noStrike" kern="0" cap="none" spc="-25" normalizeH="0" baseline="0" noProof="1" dirty="0">
+                <a:solidFill>
+                  <a:srgbClr val="6A20A7"/>
+                </a:solidFill>
+                <a:latin typeface="Microsoft Sans Serif" panose="020B0604020202020204"/>
+                <a:ea typeface="Arial" panose="020B0604020202020204" pitchFamily="34" charset="0"/>
+                <a:cs typeface="Microsoft Sans Serif" panose="020B0604020202020204"/>
+                <a:sym typeface="+mn-ea"/>
               </a:rPr>
               <a:t>model</a:t>
             </a:r>
             <a:r>
-              <a:rPr sz="1150" dirty="0">
+              <a:rPr kumimoji="0" sz="1150" b="0" i="0" u="none" strike="noStrike" kern="0" cap="none" spc="-25" normalizeH="0" baseline="0" noProof="1" dirty="0">
                 <a:solidFill>
                   <a:srgbClr val="6A20A7"/>
                 </a:solidFill>
                 <a:latin typeface="Microsoft Sans Serif" panose="020B0604020202020204"/>
-                <a:cs typeface="Microsoft Sans Serif" panose="020B0604020202020204"/>
-              </a:rPr>
-              <a:t> </a:t>
-            </a:r>
-            <a:r>
-              <a:rPr sz="1150" spc="-60" dirty="0">
+                <a:ea typeface="Arial" panose="020B0604020202020204" pitchFamily="34" charset="0"/>
+                <a:cs typeface="Microsoft Sans Serif" panose="020B0604020202020204"/>
+                <a:sym typeface="+mn-ea"/>
+              </a:rPr>
+              <a:t> </a:t>
+            </a:r>
+            <a:r>
+              <a:rPr kumimoji="0" sz="1150" b="0" i="0" u="none" strike="noStrike" kern="0" cap="none" spc="-25" normalizeH="0" baseline="0" noProof="1" dirty="0">
                 <a:solidFill>
                   <a:srgbClr val="6A20A7"/>
                 </a:solidFill>
-                <a:latin typeface="Comic Sans MS" panose="030F0702030302020204"/>
-                <a:cs typeface="Comic Sans MS" panose="030F0702030302020204"/>
+                <a:latin typeface="Microsoft Sans Serif" panose="020B0604020202020204"/>
+                <a:ea typeface="Arial" panose="020B0604020202020204" pitchFamily="34" charset="0"/>
+                <a:cs typeface="Microsoft Sans Serif" panose="020B0604020202020204"/>
+                <a:sym typeface="+mn-ea"/>
               </a:rPr>
               <a:t>(</a:t>
             </a:r>
             <a:r>
-              <a:rPr sz="1150" spc="-60" dirty="0">
+              <a:rPr kumimoji="0" sz="1150" b="0" i="0" u="none" strike="noStrike" kern="0" cap="none" spc="-25" normalizeH="0" baseline="0" noProof="1" dirty="0">
                 <a:solidFill>
                   <a:srgbClr val="6A20A7"/>
                 </a:solidFill>
                 <a:latin typeface="Microsoft Sans Serif" panose="020B0604020202020204"/>
-                <a:cs typeface="Microsoft Sans Serif" panose="020B0604020202020204"/>
-              </a:rPr>
-              <a:t>Random</a:t>
-            </a:r>
-            <a:r>
-              <a:rPr sz="1150" dirty="0">
+                <a:ea typeface="Arial" panose="020B0604020202020204" pitchFamily="34" charset="0"/>
+                <a:cs typeface="Microsoft Sans Serif" panose="020B0604020202020204"/>
+                <a:sym typeface="+mn-ea"/>
+              </a:rPr>
+              <a:t>Naive Bayes</a:t>
+            </a:r>
+            <a:r>
+              <a:rPr kumimoji="0" sz="1150" b="0" i="0" u="none" strike="noStrike" kern="0" cap="none" spc="-25" normalizeH="0" baseline="0" noProof="1" dirty="0">
                 <a:solidFill>
                   <a:srgbClr val="6A20A7"/>
                 </a:solidFill>
                 <a:latin typeface="Microsoft Sans Serif" panose="020B0604020202020204"/>
-                <a:cs typeface="Microsoft Sans Serif" panose="020B0604020202020204"/>
-              </a:rPr>
-              <a:t> </a:t>
-            </a:r>
-            <a:r>
-              <a:rPr sz="1150" spc="-25" dirty="0">
-                <a:solidFill>
-                  <a:srgbClr val="6A20A7"/>
-                </a:solidFill>
-                <a:latin typeface="Microsoft Sans Serif" panose="020B0604020202020204"/>
-                <a:cs typeface="Microsoft Sans Serif" panose="020B0604020202020204"/>
-              </a:rPr>
-              <a:t>Forest</a:t>
-            </a:r>
-            <a:r>
-              <a:rPr sz="1150" spc="-25" dirty="0">
-                <a:solidFill>
-                  <a:srgbClr val="6A20A7"/>
-                </a:solidFill>
-                <a:latin typeface="Comic Sans MS" panose="030F0702030302020204"/>
-                <a:cs typeface="Comic Sans MS" panose="030F0702030302020204"/>
+                <a:ea typeface="Arial" panose="020B0604020202020204" pitchFamily="34" charset="0"/>
+                <a:cs typeface="Microsoft Sans Serif" panose="020B0604020202020204"/>
+                <a:sym typeface="+mn-ea"/>
               </a:rPr>
               <a:t>)</a:t>
             </a:r>
-            <a:endParaRPr sz="1150">
-              <a:latin typeface="Comic Sans MS" panose="030F0702030302020204"/>
-              <a:cs typeface="Comic Sans MS" panose="030F0702030302020204"/>
+            <a:endParaRPr kumimoji="0" sz="1150" b="0" i="0" u="none" strike="noStrike" kern="0" cap="none" spc="-25" normalizeH="0" baseline="0" noProof="1" dirty="0">
+              <a:solidFill>
+                <a:srgbClr val="6A20A7"/>
+              </a:solidFill>
+              <a:latin typeface="Microsoft Sans Serif" panose="020B0604020202020204"/>
+              <a:ea typeface="Arial" panose="020B0604020202020204" pitchFamily="34" charset="0"/>
+              <a:cs typeface="Microsoft Sans Serif" panose="020B0604020202020204"/>
+              <a:sym typeface="+mn-ea"/>
             </a:endParaRPr>
           </a:p>
         </p:txBody>
@@ -15236,6 +15253,9 @@
             <a:chOff x="5995986" y="5757861"/>
             <a:chExt cx="1847850" cy="495300"/>
           </a:xfrm>
+          <a:solidFill>
+            <a:srgbClr val="FFFAEB"/>
+          </a:solidFill>
         </p:grpSpPr>
         <p:sp>
           <p:nvSpPr>
@@ -15320,9 +15340,12 @@
                 </a:path>
               </a:pathLst>
             </a:custGeom>
-            <a:solidFill>
-              <a:srgbClr val="F0FDF4"/>
-            </a:solidFill>
+            <a:grpFill/>
+            <a:ln>
+              <a:solidFill>
+                <a:srgbClr val="FCE99A"/>
+              </a:solidFill>
+            </a:ln>
           </p:spPr>
           <p:txBody>
             <a:bodyPr wrap="square" lIns="0" tIns="0" rIns="0" bIns="0" rtlCol="0"/>
@@ -15506,9 +15529,10 @@
                 </a:path>
               </a:pathLst>
             </a:custGeom>
+            <a:grpFill/>
             <a:ln w="9524">
               <a:solidFill>
-                <a:srgbClr val="86EFAB"/>
+                <a:srgbClr val="FCE99A"/>
               </a:solidFill>
             </a:ln>
           </p:spPr>
@@ -15551,7 +15575,7 @@
             <a:r>
               <a:rPr sz="1150" spc="-40" dirty="0">
                 <a:solidFill>
-                  <a:srgbClr val="15803C"/>
+                  <a:srgbClr val="B4533C"/>
                 </a:solidFill>
                 <a:latin typeface="Microsoft Sans Serif" panose="020B0604020202020204"/>
                 <a:cs typeface="Microsoft Sans Serif" panose="020B0604020202020204"/>
@@ -15561,7 +15585,7 @@
             <a:r>
               <a:rPr sz="1150" spc="-15" dirty="0">
                 <a:solidFill>
-                  <a:srgbClr val="15803C"/>
+                  <a:srgbClr val="B4533C"/>
                 </a:solidFill>
                 <a:latin typeface="Microsoft Sans Serif" panose="020B0604020202020204"/>
                 <a:cs typeface="Microsoft Sans Serif" panose="020B0604020202020204"/>
@@ -15571,7 +15595,7 @@
             <a:r>
               <a:rPr sz="1150" spc="-10" dirty="0">
                 <a:solidFill>
-                  <a:srgbClr val="15803C"/>
+                  <a:srgbClr val="B4533C"/>
                 </a:solidFill>
                 <a:latin typeface="Microsoft Sans Serif" panose="020B0604020202020204"/>
                 <a:cs typeface="Microsoft Sans Serif" panose="020B0604020202020204"/>
@@ -15581,7 +15605,7 @@
             <a:r>
               <a:rPr sz="1150" dirty="0">
                 <a:solidFill>
-                  <a:srgbClr val="15803C"/>
+                  <a:srgbClr val="B4533C"/>
                 </a:solidFill>
                 <a:latin typeface="Microsoft Sans Serif" panose="020B0604020202020204"/>
                 <a:cs typeface="Microsoft Sans Serif" panose="020B0604020202020204"/>
@@ -15591,7 +15615,7 @@
             <a:r>
               <a:rPr sz="1150" spc="-10" dirty="0">
                 <a:solidFill>
-                  <a:srgbClr val="15803C"/>
+                  <a:srgbClr val="B4533C"/>
                 </a:solidFill>
                 <a:latin typeface="Microsoft Sans Serif" panose="020B0604020202020204"/>
                 <a:cs typeface="Microsoft Sans Serif" panose="020B0604020202020204"/>
@@ -15601,7 +15625,7 @@
             <a:r>
               <a:rPr sz="1150" spc="-65" dirty="0">
                 <a:solidFill>
-                  <a:srgbClr val="15803C"/>
+                  <a:srgbClr val="B4533C"/>
                 </a:solidFill>
                 <a:latin typeface="Comic Sans MS" panose="030F0702030302020204"/>
                 <a:cs typeface="Comic Sans MS" panose="030F0702030302020204"/>
@@ -15611,7 +15635,7 @@
             <a:r>
               <a:rPr sz="1150" spc="-45" dirty="0">
                 <a:solidFill>
-                  <a:srgbClr val="15803C"/>
+                  <a:srgbClr val="B4533C"/>
                 </a:solidFill>
                 <a:latin typeface="Comic Sans MS" panose="030F0702030302020204"/>
                 <a:cs typeface="Comic Sans MS" panose="030F0702030302020204"/>
@@ -15621,14 +15645,17 @@
             <a:r>
               <a:rPr sz="1150" spc="-20" dirty="0">
                 <a:solidFill>
-                  <a:srgbClr val="15803C"/>
+                  <a:srgbClr val="B4533C"/>
                 </a:solidFill>
                 <a:latin typeface="Microsoft Sans Serif" panose="020B0604020202020204"/>
                 <a:cs typeface="Microsoft Sans Serif" panose="020B0604020202020204"/>
               </a:rPr>
               <a:t>days</a:t>
             </a:r>
-            <a:endParaRPr sz="1150">
+            <a:endParaRPr sz="1150" spc="-20" dirty="0">
+              <a:solidFill>
+                <a:srgbClr val="B4533C"/>
+              </a:solidFill>
               <a:latin typeface="Microsoft Sans Serif" panose="020B0604020202020204"/>
               <a:cs typeface="Microsoft Sans Serif" panose="020B0604020202020204"/>
             </a:endParaRPr>
@@ -15648,6 +15675,9 @@
             <a:chOff x="8043861" y="5757861"/>
             <a:chExt cx="1962150" cy="495300"/>
           </a:xfrm>
+          <a:solidFill>
+            <a:srgbClr val="DFF1F1"/>
+          </a:solidFill>
         </p:grpSpPr>
         <p:sp>
           <p:nvSpPr>
@@ -15732,9 +15762,12 @@
                 </a:path>
               </a:pathLst>
             </a:custGeom>
-            <a:solidFill>
-              <a:srgbClr val="FFFAEB"/>
-            </a:solidFill>
+            <a:grpFill/>
+            <a:ln>
+              <a:solidFill>
+                <a:srgbClr val="98D4CE"/>
+              </a:solidFill>
+            </a:ln>
           </p:spPr>
           <p:txBody>
             <a:bodyPr wrap="square" lIns="0" tIns="0" rIns="0" bIns="0" rtlCol="0"/>
@@ -15873,9 +15906,10 @@
                 </a:path>
               </a:pathLst>
             </a:custGeom>
+            <a:grpFill/>
             <a:ln w="9524">
               <a:solidFill>
-                <a:srgbClr val="FDE68A"/>
+                <a:srgbClr val="98D4CE"/>
               </a:solidFill>
             </a:ln>
           </p:spPr>
@@ -15918,7 +15952,7 @@
             <a:r>
               <a:rPr sz="1150" spc="-25" dirty="0">
                 <a:solidFill>
-                  <a:srgbClr val="B45309"/>
+                  <a:srgbClr val="00698E"/>
                 </a:solidFill>
                 <a:latin typeface="Microsoft Sans Serif" panose="020B0604020202020204"/>
                 <a:cs typeface="Microsoft Sans Serif" panose="020B0604020202020204"/>
@@ -15928,7 +15962,7 @@
             <a:r>
               <a:rPr sz="1150" spc="-30" dirty="0">
                 <a:solidFill>
-                  <a:srgbClr val="B45309"/>
+                  <a:srgbClr val="00698E"/>
                 </a:solidFill>
                 <a:latin typeface="Microsoft Sans Serif" panose="020B0604020202020204"/>
                 <a:cs typeface="Microsoft Sans Serif" panose="020B0604020202020204"/>
@@ -15938,7 +15972,7 @@
             <a:r>
               <a:rPr sz="1150" dirty="0">
                 <a:solidFill>
-                  <a:srgbClr val="B45309"/>
+                  <a:srgbClr val="00698E"/>
                 </a:solidFill>
                 <a:latin typeface="Microsoft Sans Serif" panose="020B0604020202020204"/>
                 <a:cs typeface="Microsoft Sans Serif" panose="020B0604020202020204"/>
@@ -15948,7 +15982,7 @@
             <a:r>
               <a:rPr sz="1150" spc="-25" dirty="0">
                 <a:solidFill>
-                  <a:srgbClr val="B45309"/>
+                  <a:srgbClr val="00698E"/>
                 </a:solidFill>
                 <a:latin typeface="Microsoft Sans Serif" panose="020B0604020202020204"/>
                 <a:cs typeface="Microsoft Sans Serif" panose="020B0604020202020204"/>
@@ -15958,14 +15992,17 @@
             <a:r>
               <a:rPr sz="1150" spc="-10" dirty="0">
                 <a:solidFill>
-                  <a:srgbClr val="B45309"/>
+                  <a:srgbClr val="00698E"/>
                 </a:solidFill>
                 <a:latin typeface="Microsoft Sans Serif" panose="020B0604020202020204"/>
                 <a:cs typeface="Microsoft Sans Serif" panose="020B0604020202020204"/>
               </a:rPr>
               <a:t>warning</a:t>
             </a:r>
-            <a:endParaRPr sz="1150">
+            <a:endParaRPr sz="1150" spc="-10" dirty="0">
+              <a:solidFill>
+                <a:srgbClr val="00698E"/>
+              </a:solidFill>
               <a:latin typeface="Microsoft Sans Serif" panose="020B0604020202020204"/>
               <a:cs typeface="Microsoft Sans Serif" panose="020B0604020202020204"/>
             </a:endParaRPr>
